--- a/presentations/AIYatra-Student-Ambassador-Program.pptx
+++ b/presentations/AIYatra-Student-Ambassador-Program.pptx
@@ -3314,7 +3314,7 @@
               </a:defRPr>
             </a:pPr>
             <a:r>
-              <a:t>Gatherings     Field Notes     The Yatra Way     Kind Words     Movement     Ambassadors     Blog</a:t>
+              <a:t>Events     Community     Approach     Testimonials     About     Ambassadors     Blog</a:t>
             </a:r>
           </a:p>
         </p:txBody>
@@ -3642,7 +3642,7 @@
               </a:defRPr>
             </a:pPr>
             <a:r>
-              <a:t>AIYatra Student Ambassadors are the face of the movement in their colleges — rallying classmates to Saturday meetups, hosting campus mini-sessions, and turning dense AI topics into hands-on learning their batch can actually use.</a:t>
+              <a:t>AIYatra Student Ambassadors are the face of AIYatra in their colleges — rallying classmates to Saturday meetups, hosting campus mini-sessions, and turning dense AI topics into hands-on learning their batch can actually use.</a:t>
             </a:r>
           </a:p>
         </p:txBody>
@@ -4452,7 +4452,7 @@
               </a:defRPr>
             </a:pPr>
             <a:r>
-              <a:t>Gatherings     Field Notes     The Yatra Way     Kind Words     Movement     Ambassadors     Blog</a:t>
+              <a:t>Events     Community     Approach     Testimonials     About     Ambassadors     Blog</a:t>
             </a:r>
           </a:p>
         </p:txBody>
@@ -4652,7 +4652,7 @@
               </a:defRPr>
             </a:pPr>
             <a:r>
-              <a:t>Six duties. One movement.</a:t>
+              <a:t>Six duties. One community.</a:t>
             </a:r>
           </a:p>
         </p:txBody>
@@ -6344,7 +6344,7 @@
               </a:defRPr>
             </a:pPr>
             <a:r>
-              <a:t>Gatherings     Field Notes     The Yatra Way     Kind Words     Movement     Ambassadors     Blog</a:t>
+              <a:t>Events     Community     Approach     Testimonials     About     Ambassadors     Blog</a:t>
             </a:r>
           </a:p>
         </p:txBody>
@@ -7790,7 +7790,7 @@
               </a:defRPr>
             </a:pPr>
             <a:r>
-              <a:t>Gatherings     Field Notes     The Yatra Way     Kind Words     Movement     Ambassadors     Blog</a:t>
+              <a:t>Events     Community     Approach     Testimonials     About     Ambassadors     Blog</a:t>
             </a:r>
           </a:p>
         </p:txBody>
@@ -9256,7 +9256,7 @@
               </a:defRPr>
             </a:pPr>
             <a:r>
-              <a:t>Gatherings     Field Notes     The Yatra Way     Kind Words     Movement     Ambassadors     Blog</a:t>
+              <a:t>Events     Community     Approach     Testimonials     About     Ambassadors     Blog</a:t>
             </a:r>
           </a:p>
         </p:txBody>
@@ -10184,7 +10184,7 @@
               </a:defRPr>
             </a:pPr>
             <a:r>
-              <a:t>Gatherings     Field Notes     The Yatra Way     Kind Words     Movement     Ambassadors     Blog</a:t>
+              <a:t>Events     Community     Approach     Testimonials     About     Ambassadors     Blog</a:t>
             </a:r>
           </a:p>
         </p:txBody>
